--- a/poster_revised.pptx
+++ b/poster_revised.pptx
@@ -115,7 +115,7 @@
 <file path=ppt/revisionInfo.xml><?xml version="1.0" encoding="utf-8"?>
 <p1510:revInfo xmlns:a="http://schemas.openxmlformats.org/drawingml/2006/main" xmlns:r="http://schemas.openxmlformats.org/officeDocument/2006/relationships" xmlns:p1510="http://schemas.microsoft.com/office/powerpoint/2015/10/main">
   <p1510:revLst>
-    <p1510:client id="{2B0FEA91-47D6-BD5B-F9F7-127D42C75791}" v="2273" dt="2026-02-23T17:25:34.709"/>
+    <p1510:client id="{CBF6AF2B-2950-C46E-F391-7AD9E7FB4FCC}" v="3237" dt="2026-02-25T20:14:02.422"/>
   </p1510:revLst>
 </p1510:revInfo>
 </file>
@@ -251,7 +251,7 @@
           <a:p>
             <a:fld id="{60BC2A36-4833-4F94-98C9-9A04AFB66017}" type="datetimeFigureOut">
               <a:rPr lang="en-GB" smtClean="0"/>
-              <a:t>23/02/2026</a:t>
+              <a:t>25/02/2026</a:t>
             </a:fld>
             <a:endParaRPr lang="en-GB"/>
           </a:p>
@@ -421,7 +421,7 @@
           <a:p>
             <a:fld id="{60BC2A36-4833-4F94-98C9-9A04AFB66017}" type="datetimeFigureOut">
               <a:rPr lang="en-GB" smtClean="0"/>
-              <a:t>23/02/2026</a:t>
+              <a:t>25/02/2026</a:t>
             </a:fld>
             <a:endParaRPr lang="en-GB"/>
           </a:p>
@@ -601,7 +601,7 @@
           <a:p>
             <a:fld id="{60BC2A36-4833-4F94-98C9-9A04AFB66017}" type="datetimeFigureOut">
               <a:rPr lang="en-GB" smtClean="0"/>
-              <a:t>23/02/2026</a:t>
+              <a:t>25/02/2026</a:t>
             </a:fld>
             <a:endParaRPr lang="en-GB"/>
           </a:p>
@@ -771,7 +771,7 @@
           <a:p>
             <a:fld id="{60BC2A36-4833-4F94-98C9-9A04AFB66017}" type="datetimeFigureOut">
               <a:rPr lang="en-GB" smtClean="0"/>
-              <a:t>23/02/2026</a:t>
+              <a:t>25/02/2026</a:t>
             </a:fld>
             <a:endParaRPr lang="en-GB"/>
           </a:p>
@@ -1017,7 +1017,7 @@
           <a:p>
             <a:fld id="{60BC2A36-4833-4F94-98C9-9A04AFB66017}" type="datetimeFigureOut">
               <a:rPr lang="en-GB" smtClean="0"/>
-              <a:t>23/02/2026</a:t>
+              <a:t>25/02/2026</a:t>
             </a:fld>
             <a:endParaRPr lang="en-GB"/>
           </a:p>
@@ -1249,7 +1249,7 @@
           <a:p>
             <a:fld id="{60BC2A36-4833-4F94-98C9-9A04AFB66017}" type="datetimeFigureOut">
               <a:rPr lang="en-GB" smtClean="0"/>
-              <a:t>23/02/2026</a:t>
+              <a:t>25/02/2026</a:t>
             </a:fld>
             <a:endParaRPr lang="en-GB"/>
           </a:p>
@@ -1616,7 +1616,7 @@
           <a:p>
             <a:fld id="{60BC2A36-4833-4F94-98C9-9A04AFB66017}" type="datetimeFigureOut">
               <a:rPr lang="en-GB" smtClean="0"/>
-              <a:t>23/02/2026</a:t>
+              <a:t>25/02/2026</a:t>
             </a:fld>
             <a:endParaRPr lang="en-GB"/>
           </a:p>
@@ -1734,7 +1734,7 @@
           <a:p>
             <a:fld id="{60BC2A36-4833-4F94-98C9-9A04AFB66017}" type="datetimeFigureOut">
               <a:rPr lang="en-GB" smtClean="0"/>
-              <a:t>23/02/2026</a:t>
+              <a:t>25/02/2026</a:t>
             </a:fld>
             <a:endParaRPr lang="en-GB"/>
           </a:p>
@@ -1829,7 +1829,7 @@
           <a:p>
             <a:fld id="{60BC2A36-4833-4F94-98C9-9A04AFB66017}" type="datetimeFigureOut">
               <a:rPr lang="en-GB" smtClean="0"/>
-              <a:t>23/02/2026</a:t>
+              <a:t>25/02/2026</a:t>
             </a:fld>
             <a:endParaRPr lang="en-GB"/>
           </a:p>
@@ -2106,7 +2106,7 @@
           <a:p>
             <a:fld id="{60BC2A36-4833-4F94-98C9-9A04AFB66017}" type="datetimeFigureOut">
               <a:rPr lang="en-GB" smtClean="0"/>
-              <a:t>23/02/2026</a:t>
+              <a:t>25/02/2026</a:t>
             </a:fld>
             <a:endParaRPr lang="en-GB"/>
           </a:p>
@@ -2363,7 +2363,7 @@
           <a:p>
             <a:fld id="{60BC2A36-4833-4F94-98C9-9A04AFB66017}" type="datetimeFigureOut">
               <a:rPr lang="en-GB" smtClean="0"/>
-              <a:t>23/02/2026</a:t>
+              <a:t>25/02/2026</a:t>
             </a:fld>
             <a:endParaRPr lang="en-GB"/>
           </a:p>
@@ -2576,7 +2576,7 @@
           <a:p>
             <a:fld id="{60BC2A36-4833-4F94-98C9-9A04AFB66017}" type="datetimeFigureOut">
               <a:rPr lang="en-GB" smtClean="0"/>
-              <a:t>23/02/2026</a:t>
+              <a:t>25/02/2026</a:t>
             </a:fld>
             <a:endParaRPr lang="en-GB"/>
           </a:p>
@@ -3042,8 +3042,8 @@
         </p:nvGrpSpPr>
         <p:grpSpPr>
           <a:xfrm>
-            <a:off x="566057" y="3657600"/>
-            <a:ext cx="9056914" cy="6662057"/>
+            <a:off x="608484" y="3657600"/>
+            <a:ext cx="9778187" cy="6746861"/>
             <a:chOff x="566057" y="3657600"/>
             <a:chExt cx="9056914" cy="6662057"/>
           </a:xfrm>
@@ -3162,8 +3162,8 @@
         </p:nvGrpSpPr>
         <p:grpSpPr>
           <a:xfrm>
-            <a:off x="562439" y="10579953"/>
-            <a:ext cx="9056914" cy="12635771"/>
+            <a:off x="604866" y="10537551"/>
+            <a:ext cx="9735760" cy="12678173"/>
             <a:chOff x="566057" y="3657600"/>
             <a:chExt cx="9056914" cy="6662057"/>
           </a:xfrm>
@@ -3282,10 +3282,10 @@
         </p:nvGrpSpPr>
         <p:grpSpPr>
           <a:xfrm>
-            <a:off x="11085290" y="3555999"/>
-            <a:ext cx="9056914" cy="14030042"/>
+            <a:off x="11000308" y="3640829"/>
+            <a:ext cx="9947898" cy="13224400"/>
             <a:chOff x="566057" y="3657600"/>
-            <a:chExt cx="9056914" cy="6662057"/>
+            <a:chExt cx="9056914" cy="6395476"/>
           </a:xfrm>
         </p:grpSpPr>
         <p:sp>
@@ -3303,7 +3303,7 @@
           <p:spPr>
             <a:xfrm>
               <a:off x="566057" y="3657600"/>
-              <a:ext cx="9056914" cy="6662057"/>
+              <a:ext cx="9056914" cy="6395476"/>
             </a:xfrm>
             <a:prstGeom prst="rect">
               <a:avLst/>
@@ -3402,7 +3402,7 @@
         </p:nvGrpSpPr>
         <p:grpSpPr>
           <a:xfrm>
-            <a:off x="213360" y="26181318"/>
+            <a:off x="552730" y="25926945"/>
             <a:ext cx="20251787" cy="3728275"/>
             <a:chOff x="566057" y="2699656"/>
             <a:chExt cx="9056914" cy="7620001"/>
@@ -3522,8 +3522,8 @@
         </p:nvGrpSpPr>
         <p:grpSpPr>
           <a:xfrm>
-            <a:off x="568902" y="23587431"/>
-            <a:ext cx="9052038" cy="2357374"/>
+            <a:off x="568902" y="23333018"/>
+            <a:ext cx="9815738" cy="2187765"/>
             <a:chOff x="566057" y="2699656"/>
             <a:chExt cx="9056914" cy="7620001"/>
           </a:xfrm>
@@ -3642,8 +3642,8 @@
         </p:nvSpPr>
         <p:spPr>
           <a:xfrm>
-            <a:off x="740226" y="5134854"/>
-            <a:ext cx="8577945" cy="5262979"/>
+            <a:off x="612943" y="5134854"/>
+            <a:ext cx="9723495" cy="5390185"/>
           </a:xfrm>
           <a:prstGeom prst="rect">
             <a:avLst/>
@@ -3702,8 +3702,8 @@
         </p:nvGrpSpPr>
         <p:grpSpPr>
           <a:xfrm>
-            <a:off x="11027239" y="17859359"/>
-            <a:ext cx="9056914" cy="8048641"/>
+            <a:off x="10984812" y="17392942"/>
+            <a:ext cx="9990325" cy="8091043"/>
             <a:chOff x="566057" y="3657600"/>
             <a:chExt cx="9056914" cy="6662057"/>
           </a:xfrm>
@@ -3822,8 +3822,8 @@
         </p:nvSpPr>
         <p:spPr>
           <a:xfrm>
-            <a:off x="740226" y="11888139"/>
-            <a:ext cx="8577945" cy="11818620"/>
+            <a:off x="612943" y="11888139"/>
+            <a:ext cx="9723495" cy="12187952"/>
           </a:xfrm>
           <a:prstGeom prst="rect">
             <a:avLst/>
@@ -3836,14 +3836,12 @@
           </a:bodyPr>
           <a:lstStyle/>
           <a:p>
-            <a:r>
-              <a:rPr lang="en-GB" sz="2400" b="1" dirty="0"/>
-              <a:t>							</a:t>
-            </a:r>
-            <a:r>
-              <a:rPr lang="en-GB" sz="2400" b="1" u="sng" dirty="0"/>
+            <a:pPr algn="ctr"/>
+            <a:r>
+              <a:rPr lang="en-GB" sz="2400" b="1" u="sng"/>
               <a:t>Model</a:t>
             </a:r>
+            <a:endParaRPr lang="en-US"/>
           </a:p>
           <a:p>
             <a:r>
@@ -3858,21 +3856,8 @@
               <a:rPr lang="en-GB" sz="2400" dirty="0"/>
               <a:t> YOLO v8 model [3] to separate the original image into the individuals before processing separately and re-composing the completed image.</a:t>
             </a:r>
-          </a:p>
-          <a:p>
-            <a:endParaRPr lang="en-GB" sz="2400" dirty="0"/>
-          </a:p>
-          <a:p>
-            <a:r>
-              <a:rPr lang="en-GB" sz="2400" b="1" dirty="0"/>
-              <a:t>						</a:t>
-            </a:r>
-            <a:r>
-              <a:rPr lang="en-GB" sz="2400" b="1" u="sng" dirty="0"/>
-              <a:t>Inference Pipeline</a:t>
-            </a:r>
             <a:br>
-              <a:rPr lang="en-GB" sz="2400" b="1" u="sng" dirty="0"/>
+              <a:rPr lang="en-GB" sz="2400" dirty="0"/>
             </a:br>
             <a:br>
               <a:rPr lang="en-GB" sz="2400" b="1" u="sng" dirty="0"/>
@@ -3919,10 +3904,25 @@
             <a:br>
               <a:rPr lang="en-GB" sz="2400" b="1" u="sng" dirty="0"/>
             </a:br>
+            <a:endParaRPr lang="en-GB" sz="2400" dirty="0"/>
+          </a:p>
+          <a:p>
+            <a:endParaRPr lang="en-GB" sz="2400" dirty="0"/>
+          </a:p>
+          <a:p>
             <a:r>
               <a:rPr lang="en-GB" sz="2400" dirty="0"/>
-              <a:t>The people in the input image are detected and segmented by the YOLO v8 model, the returned masks of which are used to separate each individual to their own image. FASHN VTON v1.5 is run separately for each image, yielding generated images of the people with the specified clothing. The order of the subjects is estimated heuristically, and they are recomposed into the original image back-to-front to properly handle occlusion.</a:t>
-            </a:r>
+              <a:t>The people are first segmented by the YOLO v8 model, and the masks are used to separate each subject to their own image with a blank background. FASHN VTON v1.5 is run separately for each image, generating images of the people with the specified clothing. The images are processed at intersection boundaries to prevent the blank </a:t>
+            </a:r>
+            <a:r>
+              <a:rPr lang="en-GB" sz="2400"/>
+              <a:t>background leaking. The order of the subjects is then estimated heuristically based on the concavity or convexity of overlaps, </a:t>
+            </a:r>
+            <a:r>
+              <a:rPr lang="en-GB" sz="2400" dirty="0"/>
+              <a:t>and they are recomposed into the original image back-to-front to properly handle occlusion.</a:t>
+            </a:r>
+            <a:endParaRPr lang="en-GB"/>
           </a:p>
           <a:p>
             <a:endParaRPr lang="en-GB" dirty="0"/>
@@ -4034,7 +4034,7 @@
         </p:nvSpPr>
         <p:spPr>
           <a:xfrm>
-            <a:off x="740960" y="24364373"/>
+            <a:off x="698539" y="23982813"/>
             <a:ext cx="8577945" cy="1569660"/>
           </a:xfrm>
           <a:prstGeom prst="rect">
@@ -4108,12 +4108,109 @@
           </a:p>
         </p:txBody>
       </p:sp>
+      <p:sp>
+        <p:nvSpPr>
+          <p:cNvPr id="3" name="TextBox 2">
+            <a:extLst>
+              <a:ext uri="{FF2B5EF4-FFF2-40B4-BE49-F238E27FC236}">
+                <a16:creationId xmlns:a16="http://schemas.microsoft.com/office/drawing/2014/main" id="{66D8A737-01EF-5D3F-319A-A38AFF1C3280}"/>
+              </a:ext>
+            </a:extLst>
+          </p:cNvPr>
+          <p:cNvSpPr txBox="1"/>
+          <p:nvPr/>
+        </p:nvSpPr>
+        <p:spPr>
+          <a:xfrm>
+            <a:off x="612497" y="14050313"/>
+            <a:ext cx="9723495" cy="1107996"/>
+          </a:xfrm>
+          <a:prstGeom prst="rect">
+            <a:avLst/>
+          </a:prstGeom>
+          <a:noFill/>
+        </p:spPr>
+        <p:txBody>
+          <a:bodyPr wrap="square" lIns="91440" tIns="45720" rIns="91440" bIns="45720" rtlCol="0" anchor="t">
+            <a:spAutoFit/>
+          </a:bodyPr>
+          <a:lstStyle/>
+          <a:p>
+            <a:pPr algn="ctr"/>
+            <a:r>
+              <a:rPr lang="en-GB" sz="2400" b="1" u="sng"/>
+              <a:t>Inference Pipeline</a:t>
+            </a:r>
+            <a:endParaRPr lang="en-GB" sz="2400" b="1" u="sng" dirty="0"/>
+          </a:p>
+          <a:p>
+            <a:endParaRPr lang="en-GB" sz="2400" dirty="0"/>
+          </a:p>
+          <a:p>
+            <a:endParaRPr lang="en-GB" dirty="0"/>
+          </a:p>
+        </p:txBody>
+      </p:sp>
+      <p:sp>
+        <p:nvSpPr>
+          <p:cNvPr id="13" name="TextBox 12">
+            <a:extLst>
+              <a:ext uri="{FF2B5EF4-FFF2-40B4-BE49-F238E27FC236}">
+                <a16:creationId xmlns:a16="http://schemas.microsoft.com/office/drawing/2014/main" id="{3AA79636-22EC-CDA2-4971-FC14D6D29E94}"/>
+              </a:ext>
+            </a:extLst>
+          </p:cNvPr>
+          <p:cNvSpPr txBox="1"/>
+          <p:nvPr/>
+        </p:nvSpPr>
+        <p:spPr>
+          <a:xfrm>
+            <a:off x="11090522" y="9755972"/>
+            <a:ext cx="9723495" cy="2677656"/>
+          </a:xfrm>
+          <a:prstGeom prst="rect">
+            <a:avLst/>
+          </a:prstGeom>
+          <a:noFill/>
+        </p:spPr>
+        <p:txBody>
+          <a:bodyPr wrap="square" lIns="91440" tIns="45720" rIns="91440" bIns="45720" rtlCol="0" anchor="t">
+            <a:spAutoFit/>
+          </a:bodyPr>
+          <a:lstStyle/>
+          <a:p>
+            <a:r>
+              <a:rPr lang="en-GB" sz="2400" dirty="0"/>
+              <a:t>From the above input photos, the original pipeline produced the image on the left. Only one subject has his clothing swapped, and the surrou</a:t>
+            </a:r>
+            <a:r>
+              <a:rPr lang="en-GB" sz="2400"/>
+              <a:t>nding people are corrupted by this process.</a:t>
+            </a:r>
+            <a:endParaRPr lang="en-GB" sz="2400" dirty="0"/>
+          </a:p>
+          <a:p>
+            <a:endParaRPr lang="en-GB" sz="2400" dirty="0"/>
+          </a:p>
+          <a:p>
+            <a:r>
+              <a:rPr lang="en-GB" sz="2400" dirty="0"/>
+              <a:t>Our pipeline resolves these two issues, producing the image on the right. This successfully swaps the clothing for all 4 individuals while preventing </a:t>
+            </a:r>
+            <a:r>
+              <a:rPr lang="en-GB" sz="2400"/>
+              <a:t>the corruption in the original pipeline.</a:t>
+            </a:r>
+            <a:endParaRPr lang="en-GB" sz="2400" dirty="0"/>
+          </a:p>
+        </p:txBody>
+      </p:sp>
       <p:pic>
         <p:nvPicPr>
-          <p:cNvPr id="2" name="Picture 1" descr="A diagram of a person&#10;&#10;AI-generated content may be incorrect.">
+          <p:cNvPr id="14" name="Picture 13" descr="A group of men standing together&#10;&#10;AI-generated content may be incorrect.">
             <a:extLst>
               <a:ext uri="{FF2B5EF4-FFF2-40B4-BE49-F238E27FC236}">
-                <a16:creationId xmlns:a16="http://schemas.microsoft.com/office/drawing/2014/main" id="{D8A1E83C-FE85-DF2E-1B4A-24D805261996}"/>
+                <a16:creationId xmlns:a16="http://schemas.microsoft.com/office/drawing/2014/main" id="{195DA83E-4B7E-C611-3E09-314E77E567BC}"/>
               </a:ext>
             </a:extLst>
           </p:cNvPr>
@@ -4130,8 +4227,374 @@
         </p:blipFill>
         <p:spPr>
           <a:xfrm>
-            <a:off x="602213" y="15569827"/>
-            <a:ext cx="9025595" cy="4938853"/>
+            <a:off x="11127257" y="12429023"/>
+            <a:ext cx="4858859" cy="4437748"/>
+          </a:xfrm>
+          <a:prstGeom prst="rect">
+            <a:avLst/>
+          </a:prstGeom>
+        </p:spPr>
+      </p:pic>
+      <p:pic>
+        <p:nvPicPr>
+          <p:cNvPr id="15" name="Picture 14" descr="A group of men posing for a photo&#10;&#10;AI-generated content may be incorrect.">
+            <a:extLst>
+              <a:ext uri="{FF2B5EF4-FFF2-40B4-BE49-F238E27FC236}">
+                <a16:creationId xmlns:a16="http://schemas.microsoft.com/office/drawing/2014/main" id="{3CA0F411-AF22-6A2B-961F-B8FD837AFCE2}"/>
+              </a:ext>
+            </a:extLst>
+          </p:cNvPr>
+          <p:cNvPicPr>
+            <a:picLocks noChangeAspect="1"/>
+          </p:cNvPicPr>
+          <p:nvPr/>
+        </p:nvPicPr>
+        <p:blipFill>
+          <a:blip r:embed="rId6"/>
+          <a:stretch>
+            <a:fillRect/>
+          </a:stretch>
+        </p:blipFill>
+        <p:spPr>
+          <a:xfrm>
+            <a:off x="11821113" y="5084482"/>
+            <a:ext cx="4914199" cy="4627329"/>
+          </a:xfrm>
+          <a:prstGeom prst="rect">
+            <a:avLst/>
+          </a:prstGeom>
+        </p:spPr>
+      </p:pic>
+      <p:pic>
+        <p:nvPicPr>
+          <p:cNvPr id="16" name="Picture 15" descr="A person in a black shirt&#10;&#10;AI-generated content may be incorrect.">
+            <a:extLst>
+              <a:ext uri="{FF2B5EF4-FFF2-40B4-BE49-F238E27FC236}">
+                <a16:creationId xmlns:a16="http://schemas.microsoft.com/office/drawing/2014/main" id="{F90BE98B-EFDB-090B-ACAD-26285E70B72A}"/>
+              </a:ext>
+            </a:extLst>
+          </p:cNvPr>
+          <p:cNvPicPr>
+            <a:picLocks noChangeAspect="1"/>
+          </p:cNvPicPr>
+          <p:nvPr/>
+        </p:nvPicPr>
+        <p:blipFill>
+          <a:blip r:embed="rId7"/>
+          <a:stretch>
+            <a:fillRect/>
+          </a:stretch>
+        </p:blipFill>
+        <p:spPr>
+          <a:xfrm>
+            <a:off x="17101119" y="5073556"/>
+            <a:ext cx="3135013" cy="4649139"/>
+          </a:xfrm>
+          <a:prstGeom prst="rect">
+            <a:avLst/>
+          </a:prstGeom>
+        </p:spPr>
+      </p:pic>
+      <p:sp>
+        <p:nvSpPr>
+          <p:cNvPr id="28" name="TextBox 27">
+            <a:extLst>
+              <a:ext uri="{FF2B5EF4-FFF2-40B4-BE49-F238E27FC236}">
+                <a16:creationId xmlns:a16="http://schemas.microsoft.com/office/drawing/2014/main" id="{D1EEC70F-7F5B-0C90-1E9C-982B4848436A}"/>
+              </a:ext>
+            </a:extLst>
+          </p:cNvPr>
+          <p:cNvSpPr txBox="1"/>
+          <p:nvPr/>
+        </p:nvSpPr>
+        <p:spPr>
+          <a:xfrm>
+            <a:off x="11126183" y="19083000"/>
+            <a:ext cx="9723495" cy="6370975"/>
+          </a:xfrm>
+          <a:prstGeom prst="rect">
+            <a:avLst/>
+          </a:prstGeom>
+          <a:noFill/>
+        </p:spPr>
+        <p:txBody>
+          <a:bodyPr wrap="square" lIns="91440" tIns="45720" rIns="91440" bIns="45720" rtlCol="0" anchor="t">
+            <a:spAutoFit/>
+          </a:bodyPr>
+          <a:lstStyle/>
+          <a:p>
+            <a:r>
+              <a:rPr lang="en-GB" sz="2400" dirty="0"/>
+              <a:t>While this approach shows that it is feasible to extend a pre-trained virtual try-on model to multiple subjects, several important limitations remain.</a:t>
+            </a:r>
+          </a:p>
+          <a:p>
+            <a:endParaRPr lang="en-GB" sz="2400" dirty="0"/>
+          </a:p>
+          <a:p>
+            <a:pPr>
+              <a:buFont typeface="Arial"/>
+            </a:pPr>
+            <a:r>
+              <a:rPr lang="en-GB" sz="2400" dirty="0"/>
+              <a:t>Firstly, the technique we apply here relies on an ordering of subjects to exist (i.e. back to font), however this assumption breaks down when they overlap, for example when linking arms. Such an image would require the model to either preserve the linked arm, or process both subjects in one pass, something the current model is i</a:t>
+            </a:r>
+            <a:r>
+              <a:rPr lang="en-GB" sz="2400"/>
+              <a:t>ncapable of.</a:t>
+            </a:r>
+          </a:p>
+          <a:p>
+            <a:pPr>
+              <a:buFont typeface="Arial"/>
+            </a:pPr>
+            <a:endParaRPr lang="en-GB" sz="2400" dirty="0"/>
+          </a:p>
+          <a:p>
+            <a:pPr>
+              <a:buFont typeface="Arial"/>
+            </a:pPr>
+            <a:r>
+              <a:rPr lang="en-GB" sz="2400" dirty="0"/>
+              <a:t>Secondly, this method does not work if a subject is extremely occluded. While the FASHN VTON v1.5 model can handle some occlusion of body parts, such as parts of the arms, when too much of the subject is occluded, it does not know how to correctly predict the pose or </a:t>
+            </a:r>
+            <a:r>
+              <a:rPr lang="en-GB" sz="2400"/>
+              <a:t>extrapolate body parts, leading to incorrect generation of clothing.</a:t>
+            </a:r>
+          </a:p>
+          <a:p>
+            <a:pPr>
+              <a:buFont typeface="Arial"/>
+            </a:pPr>
+            <a:endParaRPr lang="en-GB" sz="2400" dirty="0"/>
+          </a:p>
+          <a:p>
+            <a:pPr>
+              <a:buFont typeface="Arial"/>
+            </a:pPr>
+            <a:endParaRPr lang="en-GB" sz="2400" dirty="0"/>
+          </a:p>
+        </p:txBody>
+      </p:sp>
+      <p:sp>
+        <p:nvSpPr>
+          <p:cNvPr id="29" name="TextBox 28">
+            <a:extLst>
+              <a:ext uri="{FF2B5EF4-FFF2-40B4-BE49-F238E27FC236}">
+                <a16:creationId xmlns:a16="http://schemas.microsoft.com/office/drawing/2014/main" id="{4047F0EC-B674-E577-7DE2-9EE617C6CDE7}"/>
+              </a:ext>
+            </a:extLst>
+          </p:cNvPr>
+          <p:cNvSpPr txBox="1"/>
+          <p:nvPr/>
+        </p:nvSpPr>
+        <p:spPr>
+          <a:xfrm>
+            <a:off x="552289" y="27050766"/>
+            <a:ext cx="20280500" cy="3323987"/>
+          </a:xfrm>
+          <a:prstGeom prst="rect">
+            <a:avLst/>
+          </a:prstGeom>
+          <a:noFill/>
+        </p:spPr>
+        <p:txBody>
+          <a:bodyPr rot="0" spcFirstLastPara="0" vertOverflow="overflow" horzOverflow="overflow" vert="horz" wrap="square" lIns="91440" tIns="45720" rIns="91440" bIns="45720" numCol="1" spcCol="0" rtlCol="0" fromWordArt="0" anchor="t" anchorCtr="0" forceAA="0" compatLnSpc="1">
+            <a:prstTxWarp prst="textNoShape">
+              <a:avLst/>
+            </a:prstTxWarp>
+            <a:spAutoFit/>
+          </a:bodyPr>
+          <a:lstStyle/>
+          <a:p>
+            <a:r>
+              <a:rPr lang="en-GB" sz="2400" dirty="0">
+                <a:solidFill>
+                  <a:srgbClr val="000000"/>
+                </a:solidFill>
+                <a:latin typeface="Calibri"/>
+                <a:ea typeface="Calibri"/>
+                <a:cs typeface="Calibri"/>
+              </a:rPr>
+              <a:t>While</a:t>
+            </a:r>
+            <a:r>
+              <a:rPr lang="en-GB" sz="2400" b="0" i="0" u="none" strike="noStrike" baseline="0" dirty="0">
+                <a:solidFill>
+                  <a:srgbClr val="000000"/>
+                </a:solidFill>
+                <a:latin typeface="Calibri"/>
+                <a:ea typeface="Calibri"/>
+                <a:cs typeface="Calibri"/>
+              </a:rPr>
+              <a:t> this provides an inexpensive method to extend existing VTON models to multiple subjects, a more robust approach would require retraining with </a:t>
+            </a:r>
+            <a:r>
+              <a:rPr lang="en-GB" sz="2400" dirty="0">
+                <a:solidFill>
+                  <a:srgbClr val="000000"/>
+                </a:solidFill>
+                <a:latin typeface="Calibri"/>
+                <a:ea typeface="Calibri"/>
+                <a:cs typeface="Calibri"/>
+              </a:rPr>
+              <a:t>the</a:t>
+            </a:r>
+            <a:r>
+              <a:rPr lang="en-GB" sz="2400" b="0" i="0" u="none" strike="noStrike" baseline="0" dirty="0">
+                <a:solidFill>
+                  <a:srgbClr val="000000"/>
+                </a:solidFill>
+                <a:latin typeface="Calibri"/>
+                <a:ea typeface="Calibri"/>
+                <a:cs typeface="Calibri"/>
+              </a:rPr>
+              <a:t> </a:t>
+            </a:r>
+            <a:r>
+              <a:rPr lang="en-GB" sz="2400" dirty="0">
+                <a:solidFill>
+                  <a:srgbClr val="000000"/>
+                </a:solidFill>
+                <a:latin typeface="Calibri"/>
+                <a:ea typeface="Calibri"/>
+                <a:cs typeface="Calibri"/>
+              </a:rPr>
+              <a:t>model's inherent limitations</a:t>
+            </a:r>
+            <a:r>
+              <a:rPr lang="en-GB" sz="2400" b="0" i="0" u="none" strike="noStrike" baseline="0" dirty="0">
+                <a:solidFill>
+                  <a:srgbClr val="000000"/>
+                </a:solidFill>
+                <a:latin typeface="Calibri"/>
+                <a:ea typeface="Calibri"/>
+                <a:cs typeface="Calibri"/>
+              </a:rPr>
+              <a:t> in mind.</a:t>
+            </a:r>
+            <a:br>
+              <a:rPr lang="en-GB" sz="2400" dirty="0">
+                <a:solidFill>
+                  <a:srgbClr val="000000"/>
+                </a:solidFill>
+                <a:latin typeface="Calibri"/>
+                <a:ea typeface="Calibri"/>
+                <a:cs typeface="Calibri"/>
+              </a:rPr>
+            </a:br>
+            <a:br>
+              <a:rPr lang="en-GB" sz="2400" dirty="0">
+                <a:latin typeface="Calibri"/>
+                <a:ea typeface="Calibri"/>
+                <a:cs typeface="Calibri"/>
+              </a:rPr>
+            </a:br>
+            <a:r>
+              <a:rPr lang="en-GB" sz="2400" dirty="0">
+                <a:latin typeface="Calibri"/>
+                <a:ea typeface="Calibri"/>
+                <a:cs typeface="Calibri"/>
+              </a:rPr>
+              <a:t>Further work with this method could also address the background artifacts that occur from this method. Parts of the original subjects may still be visible behind </a:t>
+            </a:r>
+            <a:r>
+              <a:rPr lang="en-GB" sz="2400">
+                <a:latin typeface="Calibri"/>
+                <a:ea typeface="Calibri"/>
+                <a:cs typeface="Calibri"/>
+              </a:rPr>
+              <a:t>the recomposed image. This could be addressed by using </a:t>
+            </a:r>
+            <a:r>
+              <a:rPr lang="en-GB" sz="2400" dirty="0">
+                <a:latin typeface="Calibri"/>
+                <a:ea typeface="Calibri"/>
+                <a:cs typeface="Calibri"/>
+              </a:rPr>
+              <a:t>inpainting to remove the original subjects from the image, leaving only the background before recomposing the new subjects.</a:t>
+            </a:r>
+            <a:br>
+              <a:rPr lang="en-GB" sz="2400" dirty="0">
+                <a:latin typeface="Calibri"/>
+                <a:ea typeface="Calibri"/>
+                <a:cs typeface="Calibri"/>
+              </a:rPr>
+            </a:br>
+            <a:br>
+              <a:rPr lang="en-GB" sz="2400" dirty="0">
+                <a:latin typeface="Calibri"/>
+                <a:ea typeface="Calibri"/>
+                <a:cs typeface="Calibri"/>
+              </a:rPr>
+            </a:br>
+            <a:endParaRPr lang="en-GB" sz="2400">
+              <a:latin typeface="Calibri"/>
+              <a:ea typeface="Calibri"/>
+              <a:cs typeface="Calibri"/>
+            </a:endParaRPr>
+          </a:p>
+          <a:p>
+            <a:pPr algn="ctr"/>
+            <a:endParaRPr lang="en-GB"/>
+          </a:p>
+        </p:txBody>
+      </p:sp>
+      <p:pic>
+        <p:nvPicPr>
+          <p:cNvPr id="27" name="Picture 26" descr="A group of men in black shirts&#10;&#10;AI-generated content may be incorrect.">
+            <a:extLst>
+              <a:ext uri="{FF2B5EF4-FFF2-40B4-BE49-F238E27FC236}">
+                <a16:creationId xmlns:a16="http://schemas.microsoft.com/office/drawing/2014/main" id="{A49093B3-0C5F-AA0B-F7A0-78FC308FF35F}"/>
+              </a:ext>
+            </a:extLst>
+          </p:cNvPr>
+          <p:cNvPicPr>
+            <a:picLocks noChangeAspect="1"/>
+          </p:cNvPicPr>
+          <p:nvPr/>
+        </p:nvPicPr>
+        <p:blipFill>
+          <a:blip r:embed="rId8"/>
+          <a:stretch>
+            <a:fillRect/>
+          </a:stretch>
+        </p:blipFill>
+        <p:spPr>
+          <a:xfrm>
+            <a:off x="15972446" y="12372694"/>
+            <a:ext cx="4925572" cy="4465403"/>
+          </a:xfrm>
+          <a:prstGeom prst="rect">
+            <a:avLst/>
+          </a:prstGeom>
+        </p:spPr>
+      </p:pic>
+      <p:pic>
+        <p:nvPicPr>
+          <p:cNvPr id="30" name="Picture 29" descr="A diagram of a person&#10;&#10;AI-generated content may be incorrect.">
+            <a:extLst>
+              <a:ext uri="{FF2B5EF4-FFF2-40B4-BE49-F238E27FC236}">
+                <a16:creationId xmlns:a16="http://schemas.microsoft.com/office/drawing/2014/main" id="{E2C418E0-CACC-6694-7DDB-0B5ACB527A19}"/>
+              </a:ext>
+            </a:extLst>
+          </p:cNvPr>
+          <p:cNvPicPr>
+            <a:picLocks noChangeAspect="1"/>
+          </p:cNvPicPr>
+          <p:nvPr/>
+        </p:nvPicPr>
+        <p:blipFill>
+          <a:blip r:embed="rId9"/>
+          <a:stretch>
+            <a:fillRect/>
+          </a:stretch>
+        </p:blipFill>
+        <p:spPr>
+          <a:xfrm>
+            <a:off x="832900" y="14675691"/>
+            <a:ext cx="9412671" cy="5243353"/>
           </a:xfrm>
           <a:prstGeom prst="rect">
             <a:avLst/>
